--- a/Foundation_F3/Workshop/F3-W04_Apply_Workshop_L07-L08_Welcome_Exchange_Student.pptx
+++ b/Foundation_F3/Workshop/F3-W04_Apply_Workshop_L07-L08_Welcome_Exchange_Student.pptx
@@ -7432,7 +7432,7 @@
                 <a:latin typeface="Calibri" pitchFamily="34" charset="0"/>
                 <a:cs typeface="Amiri" pitchFamily="2" charset="-78"/>
               </a:rPr>
-              <a:t>Odd numbers come from F3-L07, even numbers from F3-L08. Core: a full sentence from the starter. Develop: add the “more” part. Stretch: link two answers with </a:t>
+              <a:t>Odd numbers come from F3-L07, even numbers from F3-L08. Core: a full sentence from the starter. Develop: add the “more” part. Stretch: link two answers with ‏</a:t>
             </a:r>
             <a:pPr algn="l" indent="0" marL="0">
               <a:buNone/>
@@ -7459,7 +7459,7 @@
                 <a:latin typeface="Calibri" pitchFamily="34" charset="0"/>
                 <a:cs typeface="Amiri" pitchFamily="2" charset="-78"/>
               </a:rPr>
-              <a:t>, </a:t>
+              <a:t>‏, ‏</a:t>
             </a:r>
             <a:pPr algn="l" indent="0" marL="0">
               <a:buNone/>
@@ -7486,7 +7486,7 @@
                 <a:latin typeface="Calibri" pitchFamily="34" charset="0"/>
                 <a:cs typeface="Amiri" pitchFamily="2" charset="-78"/>
               </a:rPr>
-              <a:t> or </a:t>
+              <a:t>‏ or ‏</a:t>
             </a:r>
             <a:pPr algn="l" indent="0" marL="0">
               <a:buNone/>
@@ -7513,7 +7513,7 @@
                 <a:latin typeface="Calibri" pitchFamily="34" charset="0"/>
                 <a:cs typeface="Amiri" pitchFamily="2" charset="-78"/>
               </a:rPr>
-              <a:t>. Swap after each question.</a:t>
+              <a:t>‏. Swap after each question.</a:t>
             </a:r>
             <a:endParaRPr lang="en-US" sz="1100" dirty="0"/>
           </a:p>
@@ -10836,7 +10836,7 @@
                 <a:latin typeface="Calibri" pitchFamily="34" charset="0"/>
                 <a:cs typeface="Amiri" pitchFamily="2" charset="-78"/>
               </a:rPr>
-              <a:t>Use positions: </a:t>
+              <a:t>Use positions: ‏</a:t>
             </a:r>
             <a:pPr algn="l" indent="0" marL="0">
               <a:buNone/>
@@ -10917,7 +10917,7 @@
                 <a:latin typeface="Calibri" pitchFamily="34" charset="0"/>
                 <a:cs typeface="Amiri" pitchFamily="2" charset="-78"/>
               </a:rPr>
-              <a:t> — and colours that agree.</a:t>
+              <a:t>‏ — and colours that agree.</a:t>
             </a:r>
             <a:endParaRPr lang="en-US" sz="1150" dirty="0"/>
           </a:p>
@@ -11054,7 +11054,7 @@
                 <a:latin typeface="Calibri" pitchFamily="34" charset="0"/>
                 <a:cs typeface="Amiri" pitchFamily="2" charset="-78"/>
               </a:rPr>
-              <a:t>Add a direction (</a:t>
+              <a:t>Add a direction (‏</a:t>
             </a:r>
             <a:pPr algn="l" indent="0" marL="0">
               <a:buNone/>
@@ -11081,7 +11081,7 @@
                 <a:latin typeface="Calibri" pitchFamily="34" charset="0"/>
                 <a:cs typeface="Amiri" pitchFamily="2" charset="-78"/>
               </a:rPr>
-              <a:t> …) and what you do in your room (</a:t>
+              <a:t> …‏) and what you do in your room (‏</a:t>
             </a:r>
             <a:pPr algn="l" indent="0" marL="0">
               <a:buNone/>
@@ -11162,7 +11162,7 @@
                 <a:latin typeface="Calibri" pitchFamily="34" charset="0"/>
                 <a:cs typeface="Amiri" pitchFamily="2" charset="-78"/>
               </a:rPr>
-              <a:t>).</a:t>
+              <a:t>‏).</a:t>
             </a:r>
             <a:endParaRPr lang="en-US" sz="1150" dirty="0"/>
           </a:p>
@@ -17579,7 +17579,7 @@
                 <a:latin typeface="Calibri" pitchFamily="34" charset="0"/>
                 <a:cs typeface="Amiri" pitchFamily="2" charset="-78"/>
               </a:rPr>
-              <a:t>near = </a:t>
+              <a:t>near = ‏</a:t>
             </a:r>
             <a:pPr algn="l" indent="0" marL="0">
               <a:buNone/>
@@ -17606,7 +17606,7 @@
                 <a:latin typeface="Calibri" pitchFamily="34" charset="0"/>
                 <a:cs typeface="Amiri" pitchFamily="2" charset="-78"/>
               </a:rPr>
-              <a:t>; far = </a:t>
+              <a:t>‏; far = ‏</a:t>
             </a:r>
             <a:pPr algn="l" indent="0" marL="0">
               <a:buNone/>
@@ -17633,7 +17633,7 @@
                 <a:latin typeface="Calibri" pitchFamily="34" charset="0"/>
                 <a:cs typeface="Amiri" pitchFamily="2" charset="-78"/>
               </a:rPr>
-              <a:t>.</a:t>
+              <a:t>‏.</a:t>
             </a:r>
             <a:endParaRPr lang="en-US" sz="1150" dirty="0"/>
           </a:p>
@@ -17844,7 +17844,7 @@
                 <a:latin typeface="Calibri" pitchFamily="34" charset="0"/>
                 <a:cs typeface="Amiri" pitchFamily="2" charset="-78"/>
               </a:rPr>
-              <a:t>Feminine noun → </a:t>
+              <a:t>Feminine noun → ‏</a:t>
             </a:r>
             <a:pPr algn="l" indent="0" marL="0">
               <a:buNone/>
@@ -17871,7 +17871,7 @@
                 <a:latin typeface="Calibri" pitchFamily="34" charset="0"/>
                 <a:cs typeface="Amiri" pitchFamily="2" charset="-78"/>
               </a:rPr>
-              <a:t>.</a:t>
+              <a:t>‏.</a:t>
             </a:r>
             <a:endParaRPr lang="en-US" sz="1150" dirty="0"/>
           </a:p>
@@ -18082,7 +18082,7 @@
                 <a:latin typeface="Calibri" pitchFamily="34" charset="0"/>
                 <a:cs typeface="Amiri" pitchFamily="2" charset="-78"/>
               </a:rPr>
-              <a:t>Feminine place → </a:t>
+              <a:t>Feminine place → ‏</a:t>
             </a:r>
             <a:pPr algn="l" indent="0" marL="0">
               <a:buNone/>
@@ -18109,7 +18109,7 @@
                 <a:latin typeface="Calibri" pitchFamily="34" charset="0"/>
                 <a:cs typeface="Amiri" pitchFamily="2" charset="-78"/>
               </a:rPr>
-              <a:t>.</a:t>
+              <a:t>‏.</a:t>
             </a:r>
             <a:endParaRPr lang="en-US" sz="1150" dirty="0"/>
           </a:p>
@@ -20309,7 +20309,7 @@
                 <a:latin typeface="Calibri" pitchFamily="34" charset="0"/>
                 <a:cs typeface="Amiri" pitchFamily="2" charset="-78"/>
               </a:rPr>
-              <a:t>☐  At least one </a:t>
+              <a:t>☐  At least one ‏</a:t>
             </a:r>
             <a:pPr algn="l" indent="0" marL="0">
               <a:buNone/>
@@ -20336,7 +20336,7 @@
                 <a:latin typeface="Calibri" pitchFamily="34" charset="0"/>
                 <a:cs typeface="Amiri" pitchFamily="2" charset="-78"/>
               </a:rPr>
-              <a:t> and one </a:t>
+              <a:t>‏ and one ‏</a:t>
             </a:r>
             <a:pPr algn="l" indent="0" marL="0">
               <a:buNone/>
@@ -20363,7 +20363,7 @@
                 <a:latin typeface="Calibri" pitchFamily="34" charset="0"/>
                 <a:cs typeface="Amiri" pitchFamily="2" charset="-78"/>
               </a:rPr>
-              <a:t> (Develop).</a:t>
+              <a:t>‏ (Develop).</a:t>
             </a:r>
             <a:endParaRPr lang="en-US" sz="1200" dirty="0"/>
           </a:p>
@@ -24070,7 +24070,7 @@
                 <a:latin typeface="Calibri" pitchFamily="34" charset="0"/>
                 <a:cs typeface="Amiri" pitchFamily="2" charset="-78"/>
               </a:rPr>
-              <a:t>use linking words (</a:t>
+              <a:t>use linking words (‏</a:t>
             </a:r>
             <a:pPr algn="l" indent="0" marL="0">
               <a:buNone/>
@@ -24178,7 +24178,7 @@
                 <a:latin typeface="Calibri" pitchFamily="34" charset="0"/>
                 <a:cs typeface="Amiri" pitchFamily="2" charset="-78"/>
               </a:rPr>
-              <a:t>)?</a:t>
+              <a:t>‏)?</a:t>
             </a:r>
             <a:endParaRPr lang="en-US" sz="1100" dirty="0"/>
           </a:p>
@@ -28124,7 +28124,7 @@
                 <a:latin typeface="Calibri" pitchFamily="34" charset="0"/>
                 <a:cs typeface="Amiri" pitchFamily="2" charset="-78"/>
               </a:rPr>
-              <a:t>I added reasons (</a:t>
+              <a:t>I added reasons (‏</a:t>
             </a:r>
             <a:pPr algn="l" indent="0" marL="0">
               <a:buNone/>
@@ -28151,7 +28151,7 @@
                 <a:latin typeface="Calibri" pitchFamily="34" charset="0"/>
                 <a:cs typeface="Amiri" pitchFamily="2" charset="-78"/>
               </a:rPr>
-              <a:t>) and extra details without frames.</a:t>
+              <a:t>‏) and extra details without frames.</a:t>
             </a:r>
             <a:endParaRPr lang="en-US" sz="1300" dirty="0"/>
           </a:p>
@@ -32279,7 +32279,7 @@
                 <a:latin typeface="Calibri" pitchFamily="34" charset="0"/>
                 <a:cs typeface="Amiri" pitchFamily="2" charset="-78"/>
               </a:rPr>
-              <a:t>☐  Add a reason (</a:t>
+              <a:t>☐  Add a reason (‏</a:t>
             </a:r>
             <a:pPr algn="l" indent="0" marL="0">
               <a:buNone/>
@@ -32306,7 +32306,7 @@
                 <a:latin typeface="Calibri" pitchFamily="34" charset="0"/>
                 <a:cs typeface="Amiri" pitchFamily="2" charset="-78"/>
               </a:rPr>
-              <a:t>) and an extra detail to every point.</a:t>
+              <a:t>‏) and an extra detail to every point.</a:t>
             </a:r>
             <a:endParaRPr lang="en-US" sz="1300" dirty="0"/>
           </a:p>
@@ -33827,7 +33827,7 @@
                 <a:latin typeface="Calibri" pitchFamily="34" charset="0"/>
                 <a:cs typeface="Amiri" pitchFamily="2" charset="-78"/>
               </a:rPr>
-              <a:t>Join a word from each lesson in one sentence with </a:t>
+              <a:t>Join a word from each lesson in one sentence with ‏</a:t>
             </a:r>
             <a:pPr algn="l" indent="0" marL="0">
               <a:buNone/>
@@ -33854,7 +33854,7 @@
                 <a:latin typeface="Calibri" pitchFamily="34" charset="0"/>
                 <a:cs typeface="Amiri" pitchFamily="2" charset="-78"/>
               </a:rPr>
-              <a:t> or </a:t>
+              <a:t>‏ or ‏</a:t>
             </a:r>
             <a:pPr algn="l" indent="0" marL="0">
               <a:buNone/>
@@ -33881,7 +33881,7 @@
                 <a:latin typeface="Calibri" pitchFamily="34" charset="0"/>
                 <a:cs typeface="Amiri" pitchFamily="2" charset="-78"/>
               </a:rPr>
-              <a:t>.</a:t>
+              <a:t>‏.</a:t>
             </a:r>
             <a:endParaRPr lang="en-US" sz="1150" dirty="0"/>
           </a:p>
